--- a/pptx/midterm/REMUS_Background_Slide_2.pptx
+++ b/pptx/midterm/REMUS_Background_Slide_2.pptx
@@ -5,10 +5,10 @@
     <p:sldMasterId xmlns:r="http://schemas.openxmlformats.org/officeDocument/2006/relationships" id="2147483648" r:id="rId1"/>
   </p:sldMasterIdLst>
   <p:notesMasterIdLst>
-    <p:notesMasterId r:id="R4210462b44e44c16"/>
+    <p:notesMasterId r:id="R7f63efef99044e8c"/>
   </p:notesMasterIdLst>
   <p:sldIdLst>
-    <p:sldId id="256" r:id="R6e6ed311d6214e69"/>
+    <p:sldId id="256" r:id="R378ebfff37664e31"/>
   </p:sldIdLst>
   <p:sldSz cx="12192000" cy="6858000" type="screen16x9"/>
   <p:notesSz cx="6858000" cy="9144000"/>
@@ -775,8 +775,8 @@
 </file>
 
 <file path=ppt/slides/slide1.xml><?xml version="1.0" encoding="utf-8"?>
-<p:sld xmlns:a="http://schemas.openxmlformats.org/drawingml/2006/main" xmlns:p="http://schemas.openxmlformats.org/presentationml/2006/main">
-  <p:cSld>
+<p:sld xmlns:a="http://schemas.openxmlformats.org/drawingml/2006/main" xmlns:r="http://schemas.openxmlformats.org/officeDocument/2006/relationships" xmlns:p="http://schemas.openxmlformats.org/presentationml/2006/main">
+  <p:cSld xmlns:a="http://schemas.openxmlformats.org/drawingml/2006/main" xmlns:p="http://schemas.openxmlformats.org/presentationml/2006/main" xmlns:r="http://schemas.openxmlformats.org/officeDocument/2006/relationships">
     <p:bg>
       <p:bgPr>
         <a:solidFill xmlns:a="http://schemas.openxmlformats.org/drawingml/2006/main">
@@ -814,16 +814,27 @@
             <a:noAutofit/>
           </a:bodyPr>
           <a:lstStyle xmlns:a="http://schemas.openxmlformats.org/drawingml/2006/main"/>
-          <a:p xmlns:a="http://schemas.openxmlformats.org/drawingml/2006/main">
-            <a:r>
-              <a:rPr lang="en-US" sz="3000" b="1">
+          <a:p>
+            <a:pPr algn="l">
+              <a:lnSpc>
+                <a:spcPct val="90000"/>
+              </a:lnSpc>
+              <a:defRPr sz="3000" b="1">
                 <a:solidFill>
                   <a:srgbClr val="183B56"/>
                 </a:solidFill>
                 <a:latin typeface="Arial"/>
                 <a:ea typeface="Arial"/>
+              </a:defRPr>
+            </a:pPr>
+            <a:r>
+              <a:rPr sz="3000" b="1">
+                <a:solidFill>
+                  <a:srgbClr val="183B56"/>
+                </a:solidFill>
+                <a:latin typeface="Arial"/>
               </a:rPr>
-              <a:t>2. Multi-FPGA Prototyping Is Fast, but Hard to Debug</a:t>
+              <a:t>Motivation: Multi-FPGA Prototyping Is Fast, but Hard to Debug</a:t>
             </a:r>
           </a:p>
         </p:txBody>
@@ -945,45 +956,6 @@
       </p:sp>
       <p:sp>
         <p:nvSpPr>
-          <p:cNvPr id="100003" name="S02.Prototype.Qualifier"/>
-          <p:cNvSpPr txBox="1"/>
-          <p:nvPr/>
-        </p:nvSpPr>
-        <p:spPr>
-          <a:xfrm>
-            <a:off x="548640" y="1664208"/>
-            <a:ext cx="5230368" cy="274320"/>
-          </a:xfrm>
-          <a:prstGeom prst="rect">
-            <a:avLst/>
-          </a:prstGeom>
-          <a:noFill/>
-          <a:ln>
-            <a:noFill/>
-          </a:ln>
-        </p:spPr>
-        <p:txBody>
-          <a:bodyPr lIns="0" tIns="0" rIns="0" bIns="0">
-            <a:noAutofit/>
-          </a:bodyPr>
-          <a:lstStyle/>
-          <a:p>
-            <a:pPr algn="ctr"/>
-            <a:r>
-              <a:rPr lang="en-US" sz="1500">
-                <a:solidFill>
-                  <a:srgbClr val="607184"/>
-                </a:solidFill>
-                <a:latin typeface="Arial"/>
-                <a:ea typeface="Arial"/>
-              </a:rPr>
-              <a:t>Typical strengths &amp; limitations</a:t>
-            </a:r>
-          </a:p>
-        </p:txBody>
-      </p:sp>
-      <p:sp>
-        <p:nvSpPr>
           <p:cNvPr id="100004" name="S02.Prototype.Divider"/>
           <p:cNvSpPr/>
           <p:nvPr/>
@@ -1083,55 +1055,32 @@
           </a:bodyPr>
           <a:lstStyle/>
           <a:p>
-            <a:pPr algn="ctr"/>
+            <a:pPr algn="ctr">
+              <a:defRPr sz="2200" b="1">
+                <a:solidFill>
+                  <a:srgbClr val="183B56"/>
+                </a:solidFill>
+                <a:latin typeface="Arial"/>
+                <a:ea typeface="Arial"/>
+              </a:defRPr>
+            </a:pPr>
             <a:r>
               <a:rPr lang="en-US" sz="2200" b="1">
                 <a:solidFill>
                   <a:srgbClr val="183B56"/>
                 </a:solidFill>
                 <a:latin typeface="Arial"/>
-                <a:ea typeface="Arial"/>
               </a:rPr>
-              <a:t>Replayable Multi-FPGA Emulation</a:t>
+              <a:t>Replayable</a:t>
             </a:r>
-          </a:p>
-        </p:txBody>
-      </p:sp>
-      <p:sp>
-        <p:nvSpPr>
-          <p:cNvPr id="100007" name="S02.Replay.Qualifier"/>
-          <p:cNvSpPr txBox="1"/>
-          <p:nvPr/>
-        </p:nvSpPr>
-        <p:spPr>
-          <a:xfrm>
-            <a:off x="6419088" y="1664208"/>
-            <a:ext cx="5230368" cy="274320"/>
-          </a:xfrm>
-          <a:prstGeom prst="rect">
-            <a:avLst/>
-          </a:prstGeom>
-          <a:noFill/>
-          <a:ln>
-            <a:noFill/>
-          </a:ln>
-        </p:spPr>
-        <p:txBody>
-          <a:bodyPr lIns="0" tIns="0" rIns="0" bIns="0">
-            <a:noAutofit/>
-          </a:bodyPr>
-          <a:lstStyle/>
-          <a:p>
-            <a:pPr algn="ctr"/>
             <a:r>
-              <a:rPr lang="en-US" sz="1500">
+              <a:rPr lang="en-US" sz="2200" b="1">
                 <a:solidFill>
-                  <a:srgbClr val="607184"/>
+                  <a:srgbClr val="183B56"/>
                 </a:solidFill>
                 <a:latin typeface="Arial"/>
-                <a:ea typeface="Arial"/>
               </a:rPr>
-              <a:t>Target capabilities</a:t>
+              <a:t xml:space="preserve"> Multi-FPGA Emulation</a:t>
             </a:r>
           </a:p>
         </p:txBody>
@@ -1181,7 +1130,7 @@
         </p:nvSpPr>
         <p:spPr>
           <a:xfrm>
-            <a:off x="795528" y="2084832"/>
+            <a:off x="795528" y="1887885"/>
             <a:ext cx="310896" cy="310896"/>
           </a:xfrm>
           <a:prstGeom prst="ellipse">
@@ -1218,7 +1167,7 @@
         </p:nvSpPr>
         <p:spPr>
           <a:xfrm rot="2700000">
-            <a:off x="868680" y="2244852"/>
+            <a:off x="868680" y="2047905"/>
             <a:ext cx="96012" cy="39319"/>
           </a:xfrm>
           <a:prstGeom prst="rect">
@@ -1255,7 +1204,7 @@
         </p:nvSpPr>
         <p:spPr>
           <a:xfrm rot="18900000">
-            <a:off x="909828" y="2219249"/>
+            <a:off x="909828" y="2022302"/>
             <a:ext cx="146304" cy="39319"/>
           </a:xfrm>
           <a:prstGeom prst="rect">
@@ -1292,7 +1241,7 @@
         </p:nvSpPr>
         <p:spPr>
           <a:xfrm>
-            <a:off x="1280160" y="2087575"/>
+            <a:off x="1280160" y="1890628"/>
             <a:ext cx="4572000" cy="310896"/>
           </a:xfrm>
           <a:prstGeom prst="rect">
@@ -1330,7 +1279,7 @@
         </p:nvSpPr>
         <p:spPr>
           <a:xfrm>
-            <a:off x="795528" y="2542032"/>
+            <a:off x="795528" y="2345085"/>
             <a:ext cx="310896" cy="310896"/>
           </a:xfrm>
           <a:prstGeom prst="ellipse">
@@ -1367,7 +1316,7 @@
         </p:nvSpPr>
         <p:spPr>
           <a:xfrm rot="2700000">
-            <a:off x="868680" y="2702052"/>
+            <a:off x="868680" y="2505105"/>
             <a:ext cx="96012" cy="39319"/>
           </a:xfrm>
           <a:prstGeom prst="rect">
@@ -1404,7 +1353,7 @@
         </p:nvSpPr>
         <p:spPr>
           <a:xfrm rot="18900000">
-            <a:off x="909828" y="2676449"/>
+            <a:off x="909828" y="2479502"/>
             <a:ext cx="146304" cy="39319"/>
           </a:xfrm>
           <a:prstGeom prst="rect">
@@ -1441,7 +1390,7 @@
         </p:nvSpPr>
         <p:spPr>
           <a:xfrm>
-            <a:off x="1280160" y="2544775"/>
+            <a:off x="1280160" y="2347828"/>
             <a:ext cx="4572000" cy="310896"/>
           </a:xfrm>
           <a:prstGeom prst="rect">
@@ -1479,7 +1428,7 @@
         </p:nvSpPr>
         <p:spPr>
           <a:xfrm>
-            <a:off x="795528" y="2999232"/>
+            <a:off x="795528" y="2802285"/>
             <a:ext cx="310896" cy="310896"/>
           </a:xfrm>
           <a:prstGeom prst="ellipse">
@@ -1516,7 +1465,7 @@
         </p:nvSpPr>
         <p:spPr>
           <a:xfrm rot="2700000">
-            <a:off x="868680" y="3159252"/>
+            <a:off x="868680" y="2962305"/>
             <a:ext cx="96012" cy="39319"/>
           </a:xfrm>
           <a:prstGeom prst="rect">
@@ -1553,7 +1502,7 @@
         </p:nvSpPr>
         <p:spPr>
           <a:xfrm rot="18900000">
-            <a:off x="909828" y="3133649"/>
+            <a:off x="909828" y="2936702"/>
             <a:ext cx="146304" cy="39319"/>
           </a:xfrm>
           <a:prstGeom prst="rect">
@@ -1590,7 +1539,7 @@
         </p:nvSpPr>
         <p:spPr>
           <a:xfrm>
-            <a:off x="1280160" y="3001975"/>
+            <a:off x="1280160" y="2805028"/>
             <a:ext cx="4572000" cy="310896"/>
           </a:xfrm>
           <a:prstGeom prst="rect">
@@ -1628,7 +1577,7 @@
         </p:nvSpPr>
         <p:spPr>
           <a:xfrm>
-            <a:off x="795528" y="3456432"/>
+            <a:off x="795528" y="3259485"/>
             <a:ext cx="310896" cy="310896"/>
           </a:xfrm>
           <a:prstGeom prst="ellipse">
@@ -1665,7 +1614,7 @@
         </p:nvSpPr>
         <p:spPr>
           <a:xfrm>
-            <a:off x="868680" y="3592678"/>
+            <a:off x="868680" y="3395731"/>
             <a:ext cx="164592" cy="39319"/>
           </a:xfrm>
           <a:prstGeom prst="rect">
@@ -1702,7 +1651,7 @@
         </p:nvSpPr>
         <p:spPr>
           <a:xfrm>
-            <a:off x="1280160" y="3459175"/>
+            <a:off x="1280160" y="3262228"/>
             <a:ext cx="4572000" cy="310896"/>
           </a:xfrm>
           <a:prstGeom prst="rect">
@@ -1740,7 +1689,7 @@
         </p:nvSpPr>
         <p:spPr>
           <a:xfrm>
-            <a:off x="795528" y="3913632"/>
+            <a:off x="795528" y="3716685"/>
             <a:ext cx="310896" cy="310896"/>
           </a:xfrm>
           <a:prstGeom prst="ellipse">
@@ -1777,7 +1726,7 @@
         </p:nvSpPr>
         <p:spPr>
           <a:xfrm>
-            <a:off x="868680" y="4049878"/>
+            <a:off x="868680" y="3852931"/>
             <a:ext cx="164592" cy="39319"/>
           </a:xfrm>
           <a:prstGeom prst="rect">
@@ -1814,7 +1763,7 @@
         </p:nvSpPr>
         <p:spPr>
           <a:xfrm>
-            <a:off x="1280160" y="3916375"/>
+            <a:off x="1280160" y="3719428"/>
             <a:ext cx="4572000" cy="310896"/>
           </a:xfrm>
           <a:prstGeom prst="rect">
@@ -1852,7 +1801,7 @@
         </p:nvSpPr>
         <p:spPr>
           <a:xfrm>
-            <a:off x="6556248" y="2084832"/>
+            <a:off x="6640656" y="1887881"/>
             <a:ext cx="310896" cy="310896"/>
           </a:xfrm>
           <a:prstGeom prst="ellipse">
@@ -1889,7 +1838,7 @@
         </p:nvSpPr>
         <p:spPr>
           <a:xfrm rot="2700000">
-            <a:off x="6629400" y="2244852"/>
+            <a:off x="6713808" y="2047901"/>
             <a:ext cx="96012" cy="39319"/>
           </a:xfrm>
           <a:prstGeom prst="rect">
@@ -1926,7 +1875,7 @@
         </p:nvSpPr>
         <p:spPr>
           <a:xfrm rot="18900000">
-            <a:off x="6670548" y="2219249"/>
+            <a:off x="6754956" y="2022298"/>
             <a:ext cx="146304" cy="39319"/>
           </a:xfrm>
           <a:prstGeom prst="rect">
@@ -1963,7 +1912,7 @@
         </p:nvSpPr>
         <p:spPr>
           <a:xfrm>
-            <a:off x="7040880" y="2087575"/>
+            <a:off x="7125288" y="1890624"/>
             <a:ext cx="4572000" cy="310896"/>
           </a:xfrm>
           <a:prstGeom prst="rect">
@@ -2001,7 +1950,7 @@
         </p:nvSpPr>
         <p:spPr>
           <a:xfrm>
-            <a:off x="6556248" y="2478024"/>
+            <a:off x="6640656" y="2281073"/>
             <a:ext cx="310896" cy="310896"/>
           </a:xfrm>
           <a:prstGeom prst="ellipse">
@@ -2038,7 +1987,7 @@
         </p:nvSpPr>
         <p:spPr>
           <a:xfrm rot="2700000">
-            <a:off x="6629400" y="2638044"/>
+            <a:off x="6713808" y="2441093"/>
             <a:ext cx="96012" cy="39319"/>
           </a:xfrm>
           <a:prstGeom prst="rect">
@@ -2075,7 +2024,7 @@
         </p:nvSpPr>
         <p:spPr>
           <a:xfrm rot="18900000">
-            <a:off x="6670548" y="2612441"/>
+            <a:off x="6754956" y="2415490"/>
             <a:ext cx="146304" cy="39319"/>
           </a:xfrm>
           <a:prstGeom prst="rect">
@@ -2112,7 +2061,7 @@
         </p:nvSpPr>
         <p:spPr>
           <a:xfrm>
-            <a:off x="7040880" y="2480767"/>
+            <a:off x="7125288" y="2283816"/>
             <a:ext cx="4572000" cy="310896"/>
           </a:xfrm>
           <a:prstGeom prst="rect">
@@ -2150,7 +2099,7 @@
         </p:nvSpPr>
         <p:spPr>
           <a:xfrm>
-            <a:off x="6556248" y="2871216"/>
+            <a:off x="6640656" y="2674265"/>
             <a:ext cx="310896" cy="310896"/>
           </a:xfrm>
           <a:prstGeom prst="ellipse">
@@ -2187,7 +2136,7 @@
         </p:nvSpPr>
         <p:spPr>
           <a:xfrm rot="2700000">
-            <a:off x="6629400" y="3031236"/>
+            <a:off x="6713808" y="2834285"/>
             <a:ext cx="96012" cy="39319"/>
           </a:xfrm>
           <a:prstGeom prst="rect">
@@ -2224,7 +2173,7 @@
         </p:nvSpPr>
         <p:spPr>
           <a:xfrm rot="18900000">
-            <a:off x="6670548" y="3005633"/>
+            <a:off x="6754956" y="2808682"/>
             <a:ext cx="146304" cy="39319"/>
           </a:xfrm>
           <a:prstGeom prst="rect">
@@ -2261,7 +2210,7 @@
         </p:nvSpPr>
         <p:spPr>
           <a:xfrm>
-            <a:off x="7040880" y="2873959"/>
+            <a:off x="7125288" y="2677008"/>
             <a:ext cx="4572000" cy="310896"/>
           </a:xfrm>
           <a:prstGeom prst="rect">
@@ -2299,7 +2248,7 @@
         </p:nvSpPr>
         <p:spPr>
           <a:xfrm>
-            <a:off x="6556248" y="3264408"/>
+            <a:off x="6640656" y="3067457"/>
             <a:ext cx="310896" cy="310896"/>
           </a:xfrm>
           <a:prstGeom prst="ellipse">
@@ -2336,7 +2285,7 @@
         </p:nvSpPr>
         <p:spPr>
           <a:xfrm rot="2700000">
-            <a:off x="6629400" y="3424428"/>
+            <a:off x="6713808" y="3227477"/>
             <a:ext cx="96012" cy="39319"/>
           </a:xfrm>
           <a:prstGeom prst="rect">
@@ -2373,7 +2322,7 @@
         </p:nvSpPr>
         <p:spPr>
           <a:xfrm rot="18900000">
-            <a:off x="6670548" y="3398825"/>
+            <a:off x="6754956" y="3201874"/>
             <a:ext cx="146304" cy="39319"/>
           </a:xfrm>
           <a:prstGeom prst="rect">
@@ -2410,7 +2359,7 @@
         </p:nvSpPr>
         <p:spPr>
           <a:xfrm>
-            <a:off x="7040880" y="3267151"/>
+            <a:off x="7125288" y="3084268"/>
             <a:ext cx="4572000" cy="310896"/>
           </a:xfrm>
           <a:prstGeom prst="rect">
@@ -2448,7 +2397,7 @@
         </p:nvSpPr>
         <p:spPr>
           <a:xfrm>
-            <a:off x="6556248" y="3657600"/>
+            <a:off x="6640656" y="3460649"/>
             <a:ext cx="310896" cy="310896"/>
           </a:xfrm>
           <a:prstGeom prst="ellipse">
@@ -2485,7 +2434,7 @@
         </p:nvSpPr>
         <p:spPr>
           <a:xfrm rot="2700000">
-            <a:off x="6629400" y="3817620"/>
+            <a:off x="6713808" y="3620669"/>
             <a:ext cx="96012" cy="39319"/>
           </a:xfrm>
           <a:prstGeom prst="rect">
@@ -2522,7 +2471,7 @@
         </p:nvSpPr>
         <p:spPr>
           <a:xfrm rot="18900000">
-            <a:off x="6670548" y="3792017"/>
+            <a:off x="6754956" y="3595066"/>
             <a:ext cx="146304" cy="39319"/>
           </a:xfrm>
           <a:prstGeom prst="rect">
@@ -2559,7 +2508,7 @@
         </p:nvSpPr>
         <p:spPr>
           <a:xfrm>
-            <a:off x="7040880" y="3660343"/>
+            <a:off x="7125288" y="3463392"/>
             <a:ext cx="4572000" cy="310896"/>
           </a:xfrm>
           <a:prstGeom prst="rect">
@@ -2597,7 +2546,7 @@
         </p:nvSpPr>
         <p:spPr>
           <a:xfrm>
-            <a:off x="6556248" y="4050792"/>
+            <a:off x="6640656" y="3853841"/>
             <a:ext cx="310896" cy="310896"/>
           </a:xfrm>
           <a:prstGeom prst="ellipse">
@@ -2634,7 +2583,7 @@
         </p:nvSpPr>
         <p:spPr>
           <a:xfrm rot="2700000">
-            <a:off x="6629400" y="4210812"/>
+            <a:off x="6713808" y="4013861"/>
             <a:ext cx="96012" cy="39319"/>
           </a:xfrm>
           <a:prstGeom prst="rect">
@@ -2671,7 +2620,7 @@
         </p:nvSpPr>
         <p:spPr>
           <a:xfrm rot="18900000">
-            <a:off x="6670548" y="4185209"/>
+            <a:off x="6754956" y="3988258"/>
             <a:ext cx="146304" cy="39319"/>
           </a:xfrm>
           <a:prstGeom prst="rect">
@@ -2708,7 +2657,7 @@
         </p:nvSpPr>
         <p:spPr>
           <a:xfrm>
-            <a:off x="7040880" y="4053535"/>
+            <a:off x="7125288" y="3856584"/>
             <a:ext cx="4572000" cy="310896"/>
           </a:xfrm>
           <a:prstGeom prst="rect">
@@ -2747,7 +2696,7 @@
           <p:nvPr/>
         </p:nvPicPr>
         <p:blipFill>
-          <a:blip xmlns:r="http://schemas.openxmlformats.org/officeDocument/2006/relationships" r:embed="R1728d0081fc841c4"/>
+          <a:blip xmlns:r="http://schemas.openxmlformats.org/officeDocument/2006/relationships" r:embed="R3796f3a5591c4668"/>
           <a:srcRect l="21371" t="23684" r="21291" b="20972"/>
           <a:stretch>
             <a:fillRect/>
@@ -2772,7 +2721,7 @@
           <p:nvPr/>
         </p:nvPicPr>
         <p:blipFill>
-          <a:blip xmlns:r="http://schemas.openxmlformats.org/officeDocument/2006/relationships" r:embed="R42ee548f53d9400a"/>
+          <a:blip xmlns:r="http://schemas.openxmlformats.org/officeDocument/2006/relationships" r:embed="R8c9a2897f6d8492c"/>
           <a:srcRect l="21371" t="23684" r="21291" b="20972"/>
           <a:stretch>
             <a:fillRect/>
@@ -2797,7 +2746,7 @@
           <p:nvPr/>
         </p:nvPicPr>
         <p:blipFill>
-          <a:blip xmlns:r="http://schemas.openxmlformats.org/officeDocument/2006/relationships" r:embed="Rf7a27cac0c4d4595"/>
+          <a:blip xmlns:r="http://schemas.openxmlformats.org/officeDocument/2006/relationships" r:embed="R7e57c6f3e4d24eba"/>
           <a:srcRect l="21371" t="23684" r="21291" b="20972"/>
           <a:stretch>
             <a:fillRect/>
@@ -2854,80 +2803,6 @@
       </p:sp>
       <p:sp>
         <p:nvSpPr>
-          <p:cNvPr id="100055" name="S02.Prototype.Link1"/>
-          <p:cNvSpPr/>
-          <p:nvPr/>
-        </p:nvSpPr>
-        <p:spPr>
-          <a:xfrm>
-            <a:off x="1911096" y="5184648"/>
-            <a:ext cx="768096" cy="237744"/>
-          </a:xfrm>
-          <a:prstGeom prst="rightArrow">
-            <a:avLst/>
-          </a:prstGeom>
-          <a:solidFill>
-            <a:srgbClr val="DF973E"/>
-          </a:solidFill>
-          <a:ln>
-            <a:noFill/>
-          </a:ln>
-        </p:spPr>
-        <p:txBody>
-          <a:bodyPr lIns="0" tIns="0" rIns="0" bIns="0">
-            <a:noAutofit/>
-          </a:bodyPr>
-          <a:lstStyle/>
-          <a:p>
-            <a:endParaRPr lang="en-US" sz="1800">
-              <a:solidFill>
-                <a:srgbClr val="20354A"/>
-              </a:solidFill>
-              <a:latin typeface="Arial"/>
-              <a:ea typeface="Arial"/>
-            </a:endParaRPr>
-          </a:p>
-        </p:txBody>
-      </p:sp>
-      <p:sp>
-        <p:nvSpPr>
-          <p:cNvPr id="100056" name="S02.Prototype.Link2"/>
-          <p:cNvSpPr/>
-          <p:nvPr/>
-        </p:nvSpPr>
-        <p:spPr>
-          <a:xfrm>
-            <a:off x="3648456" y="5184648"/>
-            <a:ext cx="768096" cy="237744"/>
-          </a:xfrm>
-          <a:prstGeom prst="rightArrow">
-            <a:avLst/>
-          </a:prstGeom>
-          <a:solidFill>
-            <a:srgbClr val="DF973E"/>
-          </a:solidFill>
-          <a:ln>
-            <a:noFill/>
-          </a:ln>
-        </p:spPr>
-        <p:txBody>
-          <a:bodyPr lIns="0" tIns="0" rIns="0" bIns="0">
-            <a:noAutofit/>
-          </a:bodyPr>
-          <a:lstStyle/>
-          <a:p>
-            <a:endParaRPr lang="en-US" sz="1800">
-              <a:solidFill>
-                <a:srgbClr val="20354A"/>
-              </a:solidFill>
-              <a:latin typeface="Arial"/>
-              <a:ea typeface="Arial"/>
-            </a:endParaRPr>
-          </a:p>
-        </p:txBody>
-      </p:sp>
-      <p:sp>
-        <p:nvSpPr>
           <p:cNvPr id="100057" name="S02.Prototype.VisibilityArrow"/>
           <p:cNvSpPr/>
           <p:nvPr/>
@@ -3404,7 +3279,7 @@
           <p:nvPr/>
         </p:nvPicPr>
         <p:blipFill>
-          <a:blip xmlns:r="http://schemas.openxmlformats.org/officeDocument/2006/relationships" r:embed="R024046477cb2474d"/>
+          <a:blip xmlns:r="http://schemas.openxmlformats.org/officeDocument/2006/relationships" r:embed="R06b9cb7189594a8c"/>
           <a:srcRect l="16746" t="16427" r="16746" b="11961"/>
           <a:stretch>
             <a:fillRect/>
@@ -3429,7 +3304,7 @@
           <p:nvPr/>
         </p:nvPicPr>
         <p:blipFill>
-          <a:blip xmlns:r="http://schemas.openxmlformats.org/officeDocument/2006/relationships" r:embed="R5066dde221b344b0"/>
+          <a:blip xmlns:r="http://schemas.openxmlformats.org/officeDocument/2006/relationships" r:embed="Rae391927d5594dca"/>
           <a:srcRect l="12280" t="25518" r="12200" b="19936"/>
           <a:stretch>
             <a:fillRect/>
@@ -3609,6 +3484,92 @@
               </a:rPr>
               <a:t>2</a:t>
             </a:r>
+          </a:p>
+        </p:txBody>
+      </p:sp>
+      <p:sp>
+        <p:nvSpPr>
+          <p:cNvPr id="100078" name="S02.Prototype.DoubleArrow1"/>
+          <p:cNvSpPr/>
+          <p:nvPr/>
+        </p:nvSpPr>
+        <p:spPr>
+          <a:xfrm>
+            <a:off x="1892103" y="5152629"/>
+            <a:ext cx="829549" cy="287803"/>
+          </a:xfrm>
+          <a:prstGeom prst="leftRightArrow">
+            <a:avLst>
+              <a:gd name="adj1" fmla="val 44000"/>
+              <a:gd name="adj2" fmla="val 28000"/>
+            </a:avLst>
+          </a:prstGeom>
+          <a:solidFill>
+            <a:srgbClr val="DF973E"/>
+          </a:solidFill>
+          <a:ln>
+            <a:noFill/>
+          </a:ln>
+        </p:spPr>
+        <p:txBody>
+          <a:bodyPr lIns="0" tIns="0" rIns="0" bIns="0">
+            <a:noAutofit/>
+          </a:bodyPr>
+          <a:lstStyle/>
+          <a:p>
+            <a:pPr>
+              <a:defRPr sz="1800">
+                <a:solidFill>
+                  <a:srgbClr val="20354A"/>
+                </a:solidFill>
+                <a:latin typeface="Arial"/>
+                <a:ea typeface="Arial"/>
+              </a:defRPr>
+            </a:pPr>
+            <a:endParaRPr sz="1800"/>
+          </a:p>
+        </p:txBody>
+      </p:sp>
+      <p:sp>
+        <p:nvSpPr>
+          <p:cNvPr id="100079" name="S02.Prototype.DoubleArrow2"/>
+          <p:cNvSpPr/>
+          <p:nvPr/>
+        </p:nvSpPr>
+        <p:spPr>
+          <a:xfrm>
+            <a:off x="3641867" y="5164190"/>
+            <a:ext cx="829549" cy="287803"/>
+          </a:xfrm>
+          <a:prstGeom prst="leftRightArrow">
+            <a:avLst>
+              <a:gd name="adj1" fmla="val 44000"/>
+              <a:gd name="adj2" fmla="val 28000"/>
+            </a:avLst>
+          </a:prstGeom>
+          <a:solidFill>
+            <a:srgbClr val="DF973E"/>
+          </a:solidFill>
+          <a:ln>
+            <a:noFill/>
+          </a:ln>
+        </p:spPr>
+        <p:txBody>
+          <a:bodyPr lIns="0" tIns="0" rIns="0" bIns="0">
+            <a:noAutofit/>
+          </a:bodyPr>
+          <a:lstStyle/>
+          <a:p>
+            <a:pPr>
+              <a:defRPr sz="1800">
+                <a:solidFill>
+                  <a:srgbClr val="20354A"/>
+                </a:solidFill>
+                <a:latin typeface="Arial"/>
+                <a:ea typeface="Arial"/>
+              </a:defRPr>
+            </a:pPr>
+            <a:endParaRPr sz="1800"/>
           </a:p>
         </p:txBody>
       </p:sp>

--- a/pptx/midterm/REMUS_Background_Slide_2.pptx
+++ b/pptx/midterm/REMUS_Background_Slide_2.pptx
@@ -5,10 +5,10 @@
     <p:sldMasterId xmlns:r="http://schemas.openxmlformats.org/officeDocument/2006/relationships" id="2147483648" r:id="rId1"/>
   </p:sldMasterIdLst>
   <p:notesMasterIdLst>
-    <p:notesMasterId r:id="R7f63efef99044e8c"/>
+    <p:notesMasterId r:id="R37ba4aafce6941da"/>
   </p:notesMasterIdLst>
   <p:sldIdLst>
-    <p:sldId id="256" r:id="R378ebfff37664e31"/>
+    <p:sldId id="256" r:id="R990d13f867e248e8"/>
   </p:sldIdLst>
   <p:sldSz cx="12192000" cy="6858000" type="screen16x9"/>
   <p:notesSz cx="6858000" cy="9144000"/>
@@ -337,13 +337,13 @@
         <a:srgbClr val="E7E6E6"/>
       </a:lt2>
       <a:accent1>
-        <a:srgbClr val="183B56"/>
+        <a:srgbClr val="C00000"/>
       </a:accent1>
       <a:accent2>
-        <a:srgbClr val="008C95"/>
+        <a:srgbClr val="70AD47"/>
       </a:accent2>
       <a:accent3>
-        <a:srgbClr val="DF973E"/>
+        <a:srgbClr val="ED7D31"/>
       </a:accent3>
       <a:accent4>
         <a:srgbClr val="FFC000"/>
@@ -821,7 +821,7 @@
               </a:lnSpc>
               <a:defRPr sz="3000" b="1">
                 <a:solidFill>
-                  <a:srgbClr val="183B56"/>
+                  <a:srgbClr val="C00000"/>
                 </a:solidFill>
                 <a:latin typeface="Arial"/>
                 <a:ea typeface="Arial"/>
@@ -830,7 +830,7 @@
             <a:r>
               <a:rPr sz="3000" b="1">
                 <a:solidFill>
-                  <a:srgbClr val="183B56"/>
+                  <a:srgbClr val="C00000"/>
                 </a:solidFill>
                 <a:latin typeface="Arial"/>
               </a:rPr>
@@ -854,10 +854,12 @@
             <a:avLst/>
           </a:prstGeom>
           <a:solidFill>
-            <a:srgbClr val="008C95"/>
-          </a:solidFill>
-          <a:ln>
-            <a:noFill/>
+            <a:srgbClr val="C55A11"/>
+          </a:solidFill>
+          <a:ln>
+            <a:solidFill>
+              <a:srgbClr val="C55A11"/>
+            </a:solidFill>
           </a:ln>
         </p:spPr>
         <p:txBody>
@@ -868,7 +870,7 @@
           <a:p>
             <a:endParaRPr lang="en-US" sz="1800">
               <a:solidFill>
-                <a:srgbClr val="20354A"/>
+                <a:srgbClr val="C55A11"/>
               </a:solidFill>
               <a:latin typeface="Arial"/>
               <a:ea typeface="Arial"/>
@@ -893,7 +895,7 @@
             </a:avLst>
           </a:prstGeom>
           <a:solidFill>
-            <a:srgbClr val="FCF4E8"/>
+            <a:srgbClr val="FFF3EF"/>
           </a:solidFill>
           <a:ln>
             <a:noFill/>
@@ -907,7 +909,7 @@
           <a:p>
             <a:endParaRPr lang="en-US" sz="1800">
               <a:solidFill>
-                <a:srgbClr val="20354A"/>
+                <a:srgbClr val="1F1F1F"/>
               </a:solidFill>
               <a:latin typeface="Arial"/>
               <a:ea typeface="Arial"/>
@@ -944,7 +946,7 @@
             <a:r>
               <a:rPr lang="en-US" sz="2200" b="1">
                 <a:solidFill>
-                  <a:srgbClr val="183B56"/>
+                  <a:srgbClr val="333333"/>
                 </a:solidFill>
                 <a:latin typeface="Arial"/>
                 <a:ea typeface="Arial"/>
@@ -969,7 +971,7 @@
             <a:avLst/>
           </a:prstGeom>
           <a:solidFill>
-            <a:srgbClr val="BDCBD4"/>
+            <a:srgbClr val="D1D1D1"/>
           </a:solidFill>
           <a:ln>
             <a:noFill/>
@@ -983,7 +985,7 @@
           <a:p>
             <a:endParaRPr lang="en-US" sz="1800">
               <a:solidFill>
-                <a:srgbClr val="20354A"/>
+                <a:srgbClr val="1F1F1F"/>
               </a:solidFill>
               <a:latin typeface="Arial"/>
               <a:ea typeface="Arial"/>
@@ -1008,7 +1010,7 @@
             </a:avLst>
           </a:prstGeom>
           <a:solidFill>
-            <a:srgbClr val="EAF4F3"/>
+            <a:srgbClr val="F1F7EC"/>
           </a:solidFill>
           <a:ln>
             <a:noFill/>
@@ -1022,7 +1024,7 @@
           <a:p>
             <a:endParaRPr lang="en-US" sz="1800">
               <a:solidFill>
-                <a:srgbClr val="20354A"/>
+                <a:srgbClr val="1F1F1F"/>
               </a:solidFill>
               <a:latin typeface="Arial"/>
               <a:ea typeface="Arial"/>
@@ -1058,7 +1060,7 @@
             <a:pPr algn="ctr">
               <a:defRPr sz="2200" b="1">
                 <a:solidFill>
-                  <a:srgbClr val="183B56"/>
+                  <a:srgbClr val="333333"/>
                 </a:solidFill>
                 <a:latin typeface="Arial"/>
                 <a:ea typeface="Arial"/>
@@ -1067,7 +1069,7 @@
             <a:r>
               <a:rPr lang="en-US" sz="2200" b="1">
                 <a:solidFill>
-                  <a:srgbClr val="183B56"/>
+                  <a:srgbClr val="333333"/>
                 </a:solidFill>
                 <a:latin typeface="Arial"/>
               </a:rPr>
@@ -1076,7 +1078,7 @@
             <a:r>
               <a:rPr lang="en-US" sz="2200" b="1">
                 <a:solidFill>
-                  <a:srgbClr val="183B56"/>
+                  <a:srgbClr val="333333"/>
                 </a:solidFill>
                 <a:latin typeface="Arial"/>
               </a:rPr>
@@ -1100,7 +1102,7 @@
             <a:avLst/>
           </a:prstGeom>
           <a:solidFill>
-            <a:srgbClr val="BDCBD4"/>
+            <a:srgbClr val="D1D1D1"/>
           </a:solidFill>
           <a:ln>
             <a:noFill/>
@@ -1114,7 +1116,7 @@
           <a:p>
             <a:endParaRPr lang="en-US" sz="1800">
               <a:solidFill>
-                <a:srgbClr val="20354A"/>
+                <a:srgbClr val="1F1F1F"/>
               </a:solidFill>
               <a:latin typeface="Arial"/>
               <a:ea typeface="Arial"/>
@@ -1137,7 +1139,7 @@
             <a:avLst/>
           </a:prstGeom>
           <a:solidFill>
-            <a:srgbClr val="008C95"/>
+            <a:srgbClr val="70AD47"/>
           </a:solidFill>
           <a:ln>
             <a:noFill/>
@@ -1151,7 +1153,7 @@
           <a:p>
             <a:endParaRPr lang="en-US" sz="1800">
               <a:solidFill>
-                <a:srgbClr val="20354A"/>
+                <a:srgbClr val="1F1F1F"/>
               </a:solidFill>
               <a:latin typeface="Arial"/>
               <a:ea typeface="Arial"/>
@@ -1188,7 +1190,7 @@
           <a:p>
             <a:endParaRPr lang="en-US" sz="1800">
               <a:solidFill>
-                <a:srgbClr val="20354A"/>
+                <a:srgbClr val="1F1F1F"/>
               </a:solidFill>
               <a:latin typeface="Arial"/>
               <a:ea typeface="Arial"/>
@@ -1225,7 +1227,7 @@
           <a:p>
             <a:endParaRPr lang="en-US" sz="1800">
               <a:solidFill>
-                <a:srgbClr val="20354A"/>
+                <a:srgbClr val="1F1F1F"/>
               </a:solidFill>
               <a:latin typeface="Arial"/>
               <a:ea typeface="Arial"/>
@@ -1261,7 +1263,7 @@
             <a:r>
               <a:rPr lang="en-US" sz="1800">
                 <a:solidFill>
-                  <a:srgbClr val="20354A"/>
+                  <a:srgbClr val="1F1F1F"/>
                 </a:solidFill>
                 <a:latin typeface="Arial"/>
                 <a:ea typeface="Arial"/>
@@ -1286,7 +1288,7 @@
             <a:avLst/>
           </a:prstGeom>
           <a:solidFill>
-            <a:srgbClr val="008C95"/>
+            <a:srgbClr val="70AD47"/>
           </a:solidFill>
           <a:ln>
             <a:noFill/>
@@ -1300,7 +1302,7 @@
           <a:p>
             <a:endParaRPr lang="en-US" sz="1800">
               <a:solidFill>
-                <a:srgbClr val="20354A"/>
+                <a:srgbClr val="1F1F1F"/>
               </a:solidFill>
               <a:latin typeface="Arial"/>
               <a:ea typeface="Arial"/>
@@ -1337,7 +1339,7 @@
           <a:p>
             <a:endParaRPr lang="en-US" sz="1800">
               <a:solidFill>
-                <a:srgbClr val="20354A"/>
+                <a:srgbClr val="1F1F1F"/>
               </a:solidFill>
               <a:latin typeface="Arial"/>
               <a:ea typeface="Arial"/>
@@ -1374,7 +1376,7 @@
           <a:p>
             <a:endParaRPr lang="en-US" sz="1800">
               <a:solidFill>
-                <a:srgbClr val="20354A"/>
+                <a:srgbClr val="1F1F1F"/>
               </a:solidFill>
               <a:latin typeface="Arial"/>
               <a:ea typeface="Arial"/>
@@ -1410,7 +1412,7 @@
             <a:r>
               <a:rPr lang="en-US" sz="1800">
                 <a:solidFill>
-                  <a:srgbClr val="20354A"/>
+                  <a:srgbClr val="1F1F1F"/>
                 </a:solidFill>
                 <a:latin typeface="Arial"/>
                 <a:ea typeface="Arial"/>
@@ -1435,7 +1437,7 @@
             <a:avLst/>
           </a:prstGeom>
           <a:solidFill>
-            <a:srgbClr val="008C95"/>
+            <a:srgbClr val="70AD47"/>
           </a:solidFill>
           <a:ln>
             <a:noFill/>
@@ -1449,7 +1451,7 @@
           <a:p>
             <a:endParaRPr lang="en-US" sz="1800">
               <a:solidFill>
-                <a:srgbClr val="20354A"/>
+                <a:srgbClr val="1F1F1F"/>
               </a:solidFill>
               <a:latin typeface="Arial"/>
               <a:ea typeface="Arial"/>
@@ -1486,7 +1488,7 @@
           <a:p>
             <a:endParaRPr lang="en-US" sz="1800">
               <a:solidFill>
-                <a:srgbClr val="20354A"/>
+                <a:srgbClr val="1F1F1F"/>
               </a:solidFill>
               <a:latin typeface="Arial"/>
               <a:ea typeface="Arial"/>
@@ -1523,7 +1525,7 @@
           <a:p>
             <a:endParaRPr lang="en-US" sz="1800">
               <a:solidFill>
-                <a:srgbClr val="20354A"/>
+                <a:srgbClr val="1F1F1F"/>
               </a:solidFill>
               <a:latin typeface="Arial"/>
               <a:ea typeface="Arial"/>
@@ -1559,7 +1561,7 @@
             <a:r>
               <a:rPr lang="en-US" sz="1800">
                 <a:solidFill>
-                  <a:srgbClr val="20354A"/>
+                  <a:srgbClr val="1F1F1F"/>
                 </a:solidFill>
                 <a:latin typeface="Arial"/>
                 <a:ea typeface="Arial"/>
@@ -1584,7 +1586,7 @@
             <a:avLst/>
           </a:prstGeom>
           <a:solidFill>
-            <a:srgbClr val="DF973E"/>
+            <a:srgbClr val="ED7D31"/>
           </a:solidFill>
           <a:ln>
             <a:noFill/>
@@ -1598,7 +1600,7 @@
           <a:p>
             <a:endParaRPr lang="en-US" sz="1800">
               <a:solidFill>
-                <a:srgbClr val="20354A"/>
+                <a:srgbClr val="1F1F1F"/>
               </a:solidFill>
               <a:latin typeface="Arial"/>
               <a:ea typeface="Arial"/>
@@ -1635,7 +1637,7 @@
           <a:p>
             <a:endParaRPr lang="en-US" sz="1800">
               <a:solidFill>
-                <a:srgbClr val="20354A"/>
+                <a:srgbClr val="1F1F1F"/>
               </a:solidFill>
               <a:latin typeface="Arial"/>
               <a:ea typeface="Arial"/>
@@ -1671,7 +1673,7 @@
             <a:r>
               <a:rPr lang="en-US" sz="1800">
                 <a:solidFill>
-                  <a:srgbClr val="20354A"/>
+                  <a:srgbClr val="1F1F1F"/>
                 </a:solidFill>
                 <a:latin typeface="Arial"/>
                 <a:ea typeface="Arial"/>
@@ -1696,7 +1698,7 @@
             <a:avLst/>
           </a:prstGeom>
           <a:solidFill>
-            <a:srgbClr val="DF973E"/>
+            <a:srgbClr val="ED7D31"/>
           </a:solidFill>
           <a:ln>
             <a:noFill/>
@@ -1710,7 +1712,7 @@
           <a:p>
             <a:endParaRPr lang="en-US" sz="1800">
               <a:solidFill>
-                <a:srgbClr val="20354A"/>
+                <a:srgbClr val="1F1F1F"/>
               </a:solidFill>
               <a:latin typeface="Arial"/>
               <a:ea typeface="Arial"/>
@@ -1747,7 +1749,7 @@
           <a:p>
             <a:endParaRPr lang="en-US" sz="1800">
               <a:solidFill>
-                <a:srgbClr val="20354A"/>
+                <a:srgbClr val="1F1F1F"/>
               </a:solidFill>
               <a:latin typeface="Arial"/>
               <a:ea typeface="Arial"/>
@@ -1783,7 +1785,7 @@
             <a:r>
               <a:rPr lang="en-US" sz="1800">
                 <a:solidFill>
-                  <a:srgbClr val="20354A"/>
+                  <a:srgbClr val="1F1F1F"/>
                 </a:solidFill>
                 <a:latin typeface="Arial"/>
                 <a:ea typeface="Arial"/>
@@ -1808,7 +1810,7 @@
             <a:avLst/>
           </a:prstGeom>
           <a:solidFill>
-            <a:srgbClr val="008C95"/>
+            <a:srgbClr val="70AD47"/>
           </a:solidFill>
           <a:ln>
             <a:noFill/>
@@ -1822,7 +1824,7 @@
           <a:p>
             <a:endParaRPr lang="en-US" sz="1800">
               <a:solidFill>
-                <a:srgbClr val="20354A"/>
+                <a:srgbClr val="1F1F1F"/>
               </a:solidFill>
               <a:latin typeface="Arial"/>
               <a:ea typeface="Arial"/>
@@ -1859,7 +1861,7 @@
           <a:p>
             <a:endParaRPr lang="en-US" sz="1800">
               <a:solidFill>
-                <a:srgbClr val="20354A"/>
+                <a:srgbClr val="1F1F1F"/>
               </a:solidFill>
               <a:latin typeface="Arial"/>
               <a:ea typeface="Arial"/>
@@ -1896,7 +1898,7 @@
           <a:p>
             <a:endParaRPr lang="en-US" sz="1800">
               <a:solidFill>
-                <a:srgbClr val="20354A"/>
+                <a:srgbClr val="1F1F1F"/>
               </a:solidFill>
               <a:latin typeface="Arial"/>
               <a:ea typeface="Arial"/>
@@ -1932,7 +1934,7 @@
             <a:r>
               <a:rPr lang="en-US" sz="1800">
                 <a:solidFill>
-                  <a:srgbClr val="20354A"/>
+                  <a:srgbClr val="1F1F1F"/>
                 </a:solidFill>
                 <a:latin typeface="Arial"/>
                 <a:ea typeface="Arial"/>
@@ -1957,7 +1959,7 @@
             <a:avLst/>
           </a:prstGeom>
           <a:solidFill>
-            <a:srgbClr val="008C95"/>
+            <a:srgbClr val="70AD47"/>
           </a:solidFill>
           <a:ln>
             <a:noFill/>
@@ -1971,7 +1973,7 @@
           <a:p>
             <a:endParaRPr lang="en-US" sz="1800">
               <a:solidFill>
-                <a:srgbClr val="20354A"/>
+                <a:srgbClr val="1F1F1F"/>
               </a:solidFill>
               <a:latin typeface="Arial"/>
               <a:ea typeface="Arial"/>
@@ -2008,7 +2010,7 @@
           <a:p>
             <a:endParaRPr lang="en-US" sz="1800">
               <a:solidFill>
-                <a:srgbClr val="20354A"/>
+                <a:srgbClr val="1F1F1F"/>
               </a:solidFill>
               <a:latin typeface="Arial"/>
               <a:ea typeface="Arial"/>
@@ -2045,7 +2047,7 @@
           <a:p>
             <a:endParaRPr lang="en-US" sz="1800">
               <a:solidFill>
-                <a:srgbClr val="20354A"/>
+                <a:srgbClr val="1F1F1F"/>
               </a:solidFill>
               <a:latin typeface="Arial"/>
               <a:ea typeface="Arial"/>
@@ -2081,7 +2083,7 @@
             <a:r>
               <a:rPr lang="en-US" sz="1800">
                 <a:solidFill>
-                  <a:srgbClr val="20354A"/>
+                  <a:srgbClr val="1F1F1F"/>
                 </a:solidFill>
                 <a:latin typeface="Arial"/>
                 <a:ea typeface="Arial"/>
@@ -2106,7 +2108,7 @@
             <a:avLst/>
           </a:prstGeom>
           <a:solidFill>
-            <a:srgbClr val="008C95"/>
+            <a:srgbClr val="70AD47"/>
           </a:solidFill>
           <a:ln>
             <a:noFill/>
@@ -2120,7 +2122,7 @@
           <a:p>
             <a:endParaRPr lang="en-US" sz="1800">
               <a:solidFill>
-                <a:srgbClr val="20354A"/>
+                <a:srgbClr val="1F1F1F"/>
               </a:solidFill>
               <a:latin typeface="Arial"/>
               <a:ea typeface="Arial"/>
@@ -2157,7 +2159,7 @@
           <a:p>
             <a:endParaRPr lang="en-US" sz="1800">
               <a:solidFill>
-                <a:srgbClr val="20354A"/>
+                <a:srgbClr val="1F1F1F"/>
               </a:solidFill>
               <a:latin typeface="Arial"/>
               <a:ea typeface="Arial"/>
@@ -2194,7 +2196,7 @@
           <a:p>
             <a:endParaRPr lang="en-US" sz="1800">
               <a:solidFill>
-                <a:srgbClr val="20354A"/>
+                <a:srgbClr val="1F1F1F"/>
               </a:solidFill>
               <a:latin typeface="Arial"/>
               <a:ea typeface="Arial"/>
@@ -2230,7 +2232,7 @@
             <a:r>
               <a:rPr lang="en-US" sz="1800">
                 <a:solidFill>
-                  <a:srgbClr val="20354A"/>
+                  <a:srgbClr val="1F1F1F"/>
                 </a:solidFill>
                 <a:latin typeface="Arial"/>
                 <a:ea typeface="Arial"/>
@@ -2255,7 +2257,7 @@
             <a:avLst/>
           </a:prstGeom>
           <a:solidFill>
-            <a:srgbClr val="008C95"/>
+            <a:srgbClr val="70AD47"/>
           </a:solidFill>
           <a:ln>
             <a:noFill/>
@@ -2269,7 +2271,7 @@
           <a:p>
             <a:endParaRPr lang="en-US" sz="1800">
               <a:solidFill>
-                <a:srgbClr val="20354A"/>
+                <a:srgbClr val="1F1F1F"/>
               </a:solidFill>
               <a:latin typeface="Arial"/>
               <a:ea typeface="Arial"/>
@@ -2306,7 +2308,7 @@
           <a:p>
             <a:endParaRPr lang="en-US" sz="1800">
               <a:solidFill>
-                <a:srgbClr val="20354A"/>
+                <a:srgbClr val="1F1F1F"/>
               </a:solidFill>
               <a:latin typeface="Arial"/>
               <a:ea typeface="Arial"/>
@@ -2343,7 +2345,7 @@
           <a:p>
             <a:endParaRPr lang="en-US" sz="1800">
               <a:solidFill>
-                <a:srgbClr val="20354A"/>
+                <a:srgbClr val="1F1F1F"/>
               </a:solidFill>
               <a:latin typeface="Arial"/>
               <a:ea typeface="Arial"/>
@@ -2379,7 +2381,7 @@
             <a:r>
               <a:rPr lang="en-US" sz="1800">
                 <a:solidFill>
-                  <a:srgbClr val="20354A"/>
+                  <a:srgbClr val="1F1F1F"/>
                 </a:solidFill>
                 <a:latin typeface="Arial"/>
                 <a:ea typeface="Arial"/>
@@ -2404,7 +2406,7 @@
             <a:avLst/>
           </a:prstGeom>
           <a:solidFill>
-            <a:srgbClr val="008C95"/>
+            <a:srgbClr val="70AD47"/>
           </a:solidFill>
           <a:ln>
             <a:noFill/>
@@ -2418,7 +2420,7 @@
           <a:p>
             <a:endParaRPr lang="en-US" sz="1800">
               <a:solidFill>
-                <a:srgbClr val="20354A"/>
+                <a:srgbClr val="1F1F1F"/>
               </a:solidFill>
               <a:latin typeface="Arial"/>
               <a:ea typeface="Arial"/>
@@ -2455,7 +2457,7 @@
           <a:p>
             <a:endParaRPr lang="en-US" sz="1800">
               <a:solidFill>
-                <a:srgbClr val="20354A"/>
+                <a:srgbClr val="1F1F1F"/>
               </a:solidFill>
               <a:latin typeface="Arial"/>
               <a:ea typeface="Arial"/>
@@ -2492,7 +2494,7 @@
           <a:p>
             <a:endParaRPr lang="en-US" sz="1800">
               <a:solidFill>
-                <a:srgbClr val="20354A"/>
+                <a:srgbClr val="1F1F1F"/>
               </a:solidFill>
               <a:latin typeface="Arial"/>
               <a:ea typeface="Arial"/>
@@ -2528,7 +2530,7 @@
             <a:r>
               <a:rPr lang="en-US" sz="1800">
                 <a:solidFill>
-                  <a:srgbClr val="20354A"/>
+                  <a:srgbClr val="1F1F1F"/>
                 </a:solidFill>
                 <a:latin typeface="Arial"/>
                 <a:ea typeface="Arial"/>
@@ -2553,7 +2555,7 @@
             <a:avLst/>
           </a:prstGeom>
           <a:solidFill>
-            <a:srgbClr val="008C95"/>
+            <a:srgbClr val="70AD47"/>
           </a:solidFill>
           <a:ln>
             <a:noFill/>
@@ -2567,7 +2569,7 @@
           <a:p>
             <a:endParaRPr lang="en-US" sz="1800">
               <a:solidFill>
-                <a:srgbClr val="20354A"/>
+                <a:srgbClr val="1F1F1F"/>
               </a:solidFill>
               <a:latin typeface="Arial"/>
               <a:ea typeface="Arial"/>
@@ -2604,7 +2606,7 @@
           <a:p>
             <a:endParaRPr lang="en-US" sz="1800">
               <a:solidFill>
-                <a:srgbClr val="20354A"/>
+                <a:srgbClr val="1F1F1F"/>
               </a:solidFill>
               <a:latin typeface="Arial"/>
               <a:ea typeface="Arial"/>
@@ -2641,7 +2643,7 @@
           <a:p>
             <a:endParaRPr lang="en-US" sz="1800">
               <a:solidFill>
-                <a:srgbClr val="20354A"/>
+                <a:srgbClr val="1F1F1F"/>
               </a:solidFill>
               <a:latin typeface="Arial"/>
               <a:ea typeface="Arial"/>
@@ -2677,7 +2679,7 @@
             <a:r>
               <a:rPr lang="en-US" sz="1800">
                 <a:solidFill>
-                  <a:srgbClr val="20354A"/>
+                  <a:srgbClr val="1F1F1F"/>
                 </a:solidFill>
                 <a:latin typeface="Arial"/>
                 <a:ea typeface="Arial"/>
@@ -2696,7 +2698,7 @@
           <p:nvPr/>
         </p:nvPicPr>
         <p:blipFill>
-          <a:blip xmlns:r="http://schemas.openxmlformats.org/officeDocument/2006/relationships" r:embed="R3796f3a5591c4668"/>
+          <a:blip xmlns:r="http://schemas.openxmlformats.org/officeDocument/2006/relationships" r:embed="R2b5bcdc1cc204cdc"/>
           <a:srcRect l="21371" t="23684" r="21291" b="20972"/>
           <a:stretch>
             <a:fillRect/>
@@ -2721,7 +2723,7 @@
           <p:nvPr/>
         </p:nvPicPr>
         <p:blipFill>
-          <a:blip xmlns:r="http://schemas.openxmlformats.org/officeDocument/2006/relationships" r:embed="R8c9a2897f6d8492c"/>
+          <a:blip xmlns:r="http://schemas.openxmlformats.org/officeDocument/2006/relationships" r:embed="R58991dd1a8734a0c"/>
           <a:srcRect l="21371" t="23684" r="21291" b="20972"/>
           <a:stretch>
             <a:fillRect/>
@@ -2746,7 +2748,7 @@
           <p:nvPr/>
         </p:nvPicPr>
         <p:blipFill>
-          <a:blip xmlns:r="http://schemas.openxmlformats.org/officeDocument/2006/relationships" r:embed="R7e57c6f3e4d24eba"/>
+          <a:blip xmlns:r="http://schemas.openxmlformats.org/officeDocument/2006/relationships" r:embed="R1b87f958a0e34152"/>
           <a:srcRect l="21371" t="23684" r="21291" b="20972"/>
           <a:stretch>
             <a:fillRect/>
@@ -2791,7 +2793,7 @@
             <a:r>
               <a:rPr lang="en-US" sz="1800" b="1">
                 <a:solidFill>
-                  <a:srgbClr val="183B56"/>
+                  <a:srgbClr val="333333"/>
                 </a:solidFill>
                 <a:latin typeface="Arial"/>
                 <a:ea typeface="Arial"/>
@@ -2816,7 +2818,7 @@
             <a:avLst/>
           </a:prstGeom>
           <a:solidFill>
-            <a:srgbClr val="91A5B5"/>
+            <a:srgbClr val="A0A0A0"/>
           </a:solidFill>
           <a:ln>
             <a:noFill/>
@@ -2830,7 +2832,7 @@
           <a:p>
             <a:endParaRPr lang="en-US" sz="1800">
               <a:solidFill>
-                <a:srgbClr val="20354A"/>
+                <a:srgbClr val="1F1F1F"/>
               </a:solidFill>
               <a:latin typeface="Arial"/>
               <a:ea typeface="Arial"/>
@@ -2855,7 +2857,7 @@
             </a:avLst>
           </a:prstGeom>
           <a:solidFill>
-            <a:srgbClr val="E0E7EC"/>
+            <a:srgbClr val="E5E5E5"/>
           </a:solidFill>
           <a:ln>
             <a:noFill/>
@@ -2871,7 +2873,7 @@
             <a:r>
               <a:rPr lang="en-US" sz="1800" b="1">
                 <a:solidFill>
-                  <a:srgbClr val="183B56"/>
+                  <a:srgbClr val="333333"/>
                 </a:solidFill>
                 <a:latin typeface="Arial"/>
                 <a:ea typeface="Arial"/>
@@ -2902,7 +2904,7 @@
           </a:solidFill>
           <a:ln w="15240">
             <a:solidFill>
-              <a:srgbClr val="008C95"/>
+              <a:srgbClr val="70AD47"/>
             </a:solidFill>
           </a:ln>
         </p:spPr>
@@ -2916,7 +2918,7 @@
             <a:r>
               <a:rPr lang="en-US" sz="1600" b="1">
                 <a:solidFill>
-                  <a:srgbClr val="183B56"/>
+                  <a:srgbClr val="333333"/>
                 </a:solidFill>
                 <a:latin typeface="Arial"/>
                 <a:ea typeface="Arial"/>
@@ -2943,11 +2945,11 @@
             </a:avLst>
           </a:prstGeom>
           <a:solidFill>
-            <a:srgbClr val="FFF0D8"/>
+            <a:srgbClr val="FFF3EF"/>
           </a:solidFill>
           <a:ln w="15240">
             <a:solidFill>
-              <a:srgbClr val="DF973E"/>
+              <a:srgbClr val="ED7D31"/>
             </a:solidFill>
           </a:ln>
         </p:spPr>
@@ -2961,7 +2963,7 @@
             <a:r>
               <a:rPr lang="en-US" sz="1600" b="1">
                 <a:solidFill>
-                  <a:srgbClr val="183B56"/>
+                  <a:srgbClr val="333333"/>
                 </a:solidFill>
                 <a:latin typeface="Arial"/>
                 <a:ea typeface="Arial"/>
@@ -2992,7 +2994,7 @@
           </a:solidFill>
           <a:ln w="15240">
             <a:solidFill>
-              <a:srgbClr val="008C95"/>
+              <a:srgbClr val="70AD47"/>
             </a:solidFill>
           </a:ln>
         </p:spPr>
@@ -3006,7 +3008,7 @@
             <a:r>
               <a:rPr lang="en-US" sz="1600" b="1">
                 <a:solidFill>
-                  <a:srgbClr val="183B56"/>
+                  <a:srgbClr val="333333"/>
                 </a:solidFill>
                 <a:latin typeface="Arial"/>
                 <a:ea typeface="Arial"/>
@@ -3037,7 +3039,7 @@
           </a:solidFill>
           <a:ln w="15240">
             <a:solidFill>
-              <a:srgbClr val="008C95"/>
+              <a:srgbClr val="70AD47"/>
             </a:solidFill>
           </a:ln>
         </p:spPr>
@@ -3051,7 +3053,7 @@
             <a:r>
               <a:rPr lang="en-US" sz="1600" b="1">
                 <a:solidFill>
-                  <a:srgbClr val="183B56"/>
+                  <a:srgbClr val="333333"/>
                 </a:solidFill>
                 <a:latin typeface="Arial"/>
                 <a:ea typeface="Arial"/>
@@ -3082,7 +3084,7 @@
           </a:solidFill>
           <a:ln w="15240">
             <a:solidFill>
-              <a:srgbClr val="008C95"/>
+              <a:srgbClr val="70AD47"/>
             </a:solidFill>
           </a:ln>
         </p:spPr>
@@ -3096,7 +3098,7 @@
             <a:r>
               <a:rPr lang="en-US" sz="1600" b="1">
                 <a:solidFill>
-                  <a:srgbClr val="183B56"/>
+                  <a:srgbClr val="333333"/>
                 </a:solidFill>
                 <a:latin typeface="Arial"/>
                 <a:ea typeface="Arial"/>
@@ -3125,7 +3127,7 @@
           </a:prstGeom>
           <a:ln w="22860">
             <a:solidFill>
-              <a:srgbClr val="183B56"/>
+              <a:srgbClr val="333333"/>
             </a:solidFill>
             <a:tailEnd type="triangle"/>
           </a:ln>
@@ -3150,7 +3152,7 @@
           </a:prstGeom>
           <a:ln w="22860">
             <a:solidFill>
-              <a:srgbClr val="183B56"/>
+              <a:srgbClr val="333333"/>
             </a:solidFill>
             <a:tailEnd type="triangle"/>
           </a:ln>
@@ -3175,7 +3177,7 @@
           </a:prstGeom>
           <a:ln w="22860">
             <a:solidFill>
-              <a:srgbClr val="183B56"/>
+              <a:srgbClr val="333333"/>
             </a:solidFill>
             <a:tailEnd type="triangle"/>
           </a:ln>
@@ -3200,7 +3202,7 @@
           </a:prstGeom>
           <a:ln w="22860">
             <a:solidFill>
-              <a:srgbClr val="183B56"/>
+              <a:srgbClr val="333333"/>
             </a:solidFill>
             <a:tailEnd type="triangle"/>
           </a:ln>
@@ -3222,7 +3224,7 @@
           </a:prstGeom>
           <a:ln w="31750">
             <a:solidFill>
-              <a:srgbClr val="DF973E"/>
+              <a:srgbClr val="ED7D31"/>
             </a:solidFill>
           </a:ln>
         </p:spPr>
@@ -3243,7 +3245,7 @@
           </a:prstGeom>
           <a:ln w="31750">
             <a:solidFill>
-              <a:srgbClr val="DF973E"/>
+              <a:srgbClr val="ED7D31"/>
             </a:solidFill>
           </a:ln>
         </p:spPr>
@@ -3264,7 +3266,7 @@
           </a:prstGeom>
           <a:ln w="31750">
             <a:solidFill>
-              <a:srgbClr val="DF973E"/>
+              <a:srgbClr val="ED7D31"/>
             </a:solidFill>
             <a:tailEnd type="triangle"/>
           </a:ln>
@@ -3279,7 +3281,7 @@
           <p:nvPr/>
         </p:nvPicPr>
         <p:blipFill>
-          <a:blip xmlns:r="http://schemas.openxmlformats.org/officeDocument/2006/relationships" r:embed="R06b9cb7189594a8c"/>
+          <a:blip xmlns:r="http://schemas.openxmlformats.org/officeDocument/2006/relationships" r:embed="Rca8d711229c54dae"/>
           <a:srcRect l="16746" t="16427" r="16746" b="11961"/>
           <a:stretch>
             <a:fillRect/>
@@ -3304,7 +3306,7 @@
           <p:nvPr/>
         </p:nvPicPr>
         <p:blipFill>
-          <a:blip xmlns:r="http://schemas.openxmlformats.org/officeDocument/2006/relationships" r:embed="Rae391927d5594dca"/>
+          <a:blip xmlns:r="http://schemas.openxmlformats.org/officeDocument/2006/relationships" r:embed="Ra9805e5300c141aa"/>
           <a:srcRect l="12280" t="25518" r="12200" b="19936"/>
           <a:stretch>
             <a:fillRect/>
@@ -3339,7 +3341,7 @@
           </a:prstGeom>
           <a:ln w="22860">
             <a:solidFill>
-              <a:srgbClr val="183B56"/>
+              <a:srgbClr val="333333"/>
             </a:solidFill>
             <a:tailEnd type="triangle"/>
           </a:ln>
@@ -3364,7 +3366,7 @@
           </a:prstGeom>
           <a:ln w="22860">
             <a:solidFill>
-              <a:srgbClr val="183B56"/>
+              <a:srgbClr val="333333"/>
             </a:solidFill>
             <a:tailEnd type="triangle"/>
           </a:ln>
@@ -3399,7 +3401,7 @@
             <a:r>
               <a:rPr lang="en-US" sz="1400">
                 <a:solidFill>
-                  <a:srgbClr val="183B56"/>
+                  <a:srgbClr val="333333"/>
                 </a:solidFill>
                 <a:latin typeface="Arial"/>
                 <a:ea typeface="Arial"/>
@@ -3438,7 +3440,7 @@
             <a:r>
               <a:rPr lang="en-US" sz="1400">
                 <a:solidFill>
-                  <a:srgbClr val="183B56"/>
+                  <a:srgbClr val="333333"/>
                 </a:solidFill>
                 <a:latin typeface="Arial"/>
                 <a:ea typeface="Arial"/>
@@ -3477,7 +3479,7 @@
             <a:r>
               <a:rPr lang="en-US" sz="1000">
                 <a:solidFill>
-                  <a:srgbClr val="607184"/>
+                  <a:srgbClr val="898989"/>
                 </a:solidFill>
                 <a:latin typeface="Arial"/>
                 <a:ea typeface="Arial"/>
@@ -3505,7 +3507,7 @@
             </a:avLst>
           </a:prstGeom>
           <a:solidFill>
-            <a:srgbClr val="DF973E"/>
+            <a:srgbClr val="ED7D31"/>
           </a:solidFill>
           <a:ln>
             <a:noFill/>
@@ -3520,7 +3522,7 @@
             <a:pPr>
               <a:defRPr sz="1800">
                 <a:solidFill>
-                  <a:srgbClr val="20354A"/>
+                  <a:srgbClr val="1F1F1F"/>
                 </a:solidFill>
                 <a:latin typeface="Arial"/>
                 <a:ea typeface="Arial"/>
@@ -3548,7 +3550,7 @@
             </a:avLst>
           </a:prstGeom>
           <a:solidFill>
-            <a:srgbClr val="DF973E"/>
+            <a:srgbClr val="ED7D31"/>
           </a:solidFill>
           <a:ln>
             <a:noFill/>
@@ -3563,7 +3565,7 @@
             <a:pPr>
               <a:defRPr sz="1800">
                 <a:solidFill>
-                  <a:srgbClr val="20354A"/>
+                  <a:srgbClr val="1F1F1F"/>
                 </a:solidFill>
                 <a:latin typeface="Arial"/>
                 <a:ea typeface="Arial"/>
@@ -3595,13 +3597,13 @@
         <a:srgbClr val="E7E6E6"/>
       </a:lt2>
       <a:accent1>
-        <a:srgbClr val="183B56"/>
+        <a:srgbClr val="C00000"/>
       </a:accent1>
       <a:accent2>
-        <a:srgbClr val="008C95"/>
+        <a:srgbClr val="70AD47"/>
       </a:accent2>
       <a:accent3>
-        <a:srgbClr val="DF973E"/>
+        <a:srgbClr val="ED7D31"/>
       </a:accent3>
       <a:accent4>
         <a:srgbClr val="FFC000"/>
